--- a/docs/sunum/sirket/apya-sunum-sirket.pptx
+++ b/docs/sunum/sirket/apya-sunum-sirket.pptx
@@ -20,10 +20,9 @@
     <p:sldId id="268" r:id="rId14"/>
     <p:sldId id="269" r:id="rId15"/>
     <p:sldId id="270" r:id="rId16"/>
-    <p:sldId id="271" r:id="rId17"/>
   </p:sldIdLst>
   <p:notesMasterIdLst>
-    <p:notesMasterId r:id="rId18"/>
+    <p:notesMasterId r:id="rId17"/>
   </p:notesMasterIdLst>
   <p:sldSz cx="12192000" cy="6858000"/>
   <p:notesSz cx="6858000" cy="12192000"/>
@@ -697,9 +696,9 @@
           <a:p>
             <a:r>
               <a:rPr lang="en-US" dirty="0"/>
-              <a:t>İlk değerlendirmeyi yapay zekâ yapar
-Kararı siz verirsiniz — o sadece ön eleme ve gerekçe hazırlar.
-Yapay zekâ kendi kuralını uydurmaz: kriterleri siz yazarsınız, o uygular ve her puan için gerekçesini kayda geçer.</a:t>
+              <a:t>Size uygun hibeyi kaçırmayın
+Açık çağrılar tek listede; profilinize uyanlar öne çıkar.
+Kazanılan hibe normal bir projeye dönüşür — bütçesi, görevleri ve harcama belgeleriyle aynı sistemde yürür.</a:t>
             </a:r>
             <a:endParaRPr lang="en-US" dirty="0"/>
           </a:p>
@@ -787,9 +786,9 @@
           <a:p>
             <a:r>
               <a:rPr lang="en-US" dirty="0"/>
-              <a:t>Size uygun hibeyi kaçırmayın
-Açık çağrılar tek listede; profilinize uyanlar öne çıkar.
-Kazanılan hibe normal bir projeye dönüşür — bütçesi, görevleri ve harcama belgeleriyle aynı sistemde yürür.</a:t>
+              <a:t>Herkes yalnızca kendi işini görür
+Yetkiler modül modül açılır; kimse görmemesi gerekeni görmez.
+Roller örnektir — kendi organizasyonunuza göre yeni rol tanımlanabilir, mevcutların yetkisi tek tek değiştirilebilir.</a:t>
             </a:r>
             <a:endParaRPr lang="en-US" dirty="0"/>
           </a:p>
@@ -877,9 +876,9 @@
           <a:p>
             <a:r>
               <a:rPr lang="en-US" dirty="0"/>
-              <a:t>Herkes yalnızca kendi işini görür
-Yetkiler modül modül açılır; kimse görmemesi gerekeni görmez.
-Roller örnektir — kendi organizasyonunuza göre yeni rol tanımlanabilir, mevcutların yetkisi tek tek değiştirilebilir.</a:t>
+              <a:t>Şirketiniz kendi kapalı alanında
+Birden fazla şirketi tek platformda, birbirine karıştırmadan yönetirsiniz.
+Grup şirketleri, şubeler veya farklı markalar ayrı bölmelerde durur; raporlarınız yalnızca kendi verinizi kapsar.</a:t>
             </a:r>
             <a:endParaRPr lang="en-US" dirty="0"/>
           </a:p>
@@ -967,9 +966,9 @@
           <a:p>
             <a:r>
               <a:rPr lang="en-US" dirty="0"/>
-              <a:t>Şirketiniz kendi kapalı alanında
-Birden fazla şirketi tek platformda, birbirine karıştırmadan yönetirsiniz.
-Grup şirketleri, şubeler veya farklı markalar ayrı bölmelerde durur; raporlarınız yalnızca kendi verinizi kapsar.</a:t>
+              <a:t>Ofiste, sahada, yolda
+Aynı sistem üç ekran boyutunda da çalışır.
+Sahadaki ekip telefondan görev günceller ve fotoğraf yükler; ofis aynı anda güncel durumu görür.</a:t>
             </a:r>
             <a:endParaRPr lang="en-US" dirty="0"/>
           </a:p>
@@ -1057,96 +1056,6 @@
           <a:p>
             <a:r>
               <a:rPr lang="en-US" dirty="0"/>
-              <a:t>Ofiste, sahada, yolda
-Aynı sistem üç ekran boyutunda da çalışır.
-Sahadaki ekip telefondan görev günceller ve fotoğraf yükler; ofis aynı anda güncel durumu görür.</a:t>
-            </a:r>
-            <a:endParaRPr lang="en-US" dirty="0"/>
-          </a:p>
-        </p:txBody>
-      </p:sp>
-      <p:sp>
-        <p:nvSpPr>
-          <p:cNvPr id="4" name="Slide Number Placeholder 3"/>
-          <p:cNvSpPr>
-            <a:spLocks noGrp="1"/>
-          </p:cNvSpPr>
-          <p:nvPr>
-            <p:ph type="sldNum" sz="quarter" idx="10"/>
-          </p:nvPr>
-        </p:nvSpPr>
-        <p:spPr/>
-        <p:txBody>
-          <a:bodyPr/>
-          <a:lstStyle/>
-          <a:p>
-            <a:fld id="{F7021451-1387-4CA6-816F-3879F97B5CBC}" type="slidenum">
-              <a:rPr lang="en-US"/>
-              <a:t>15</a:t>
-            </a:fld>
-            <a:endParaRPr lang="en-US"/>
-          </a:p>
-        </p:txBody>
-      </p:sp>
-    </p:spTree>
-    <p:extLst>
-      <p:ext uri="{BB962C8B-B14F-4D97-AF65-F5344CB8AC3E}">
-        <p14:creationId xmlns:p14="http://schemas.microsoft.com/office/powerpoint/2010/main" val="1024086991"/>
-      </p:ext>
-    </p:extLst>
-  </p:cSld>
-  <p:clrMapOvr>
-    <a:masterClrMapping/>
-  </p:clrMapOvr>
-</p:notes>
-</file>
-
-<file path=ppt/notesSlides/notesSlide16.xml><?xml version="1.0" encoding="utf-8"?>
-<p:notes xmlns:a="http://schemas.openxmlformats.org/drawingml/2006/main" xmlns:r="http://schemas.openxmlformats.org/officeDocument/2006/relationships" xmlns:p="http://schemas.openxmlformats.org/presentationml/2006/main">
-  <p:cSld>
-    <p:spTree>
-      <p:nvGrpSpPr>
-        <p:cNvPr id="1" name=""/>
-        <p:cNvGrpSpPr/>
-        <p:nvPr/>
-      </p:nvGrpSpPr>
-      <p:grpSpPr>
-        <a:xfrm>
-          <a:off x="0" y="0"/>
-          <a:ext cx="0" cy="0"/>
-          <a:chOff x="0" y="0"/>
-          <a:chExt cx="0" cy="0"/>
-        </a:xfrm>
-      </p:grpSpPr>
-      <p:sp>
-        <p:nvSpPr>
-          <p:cNvPr id="2" name="Slide Image Placeholder 1"/>
-          <p:cNvSpPr>
-            <a:spLocks noGrp="1" noRot="1" noChangeAspect="1"/>
-          </p:cNvSpPr>
-          <p:nvPr>
-            <p:ph type="sldImg"/>
-          </p:nvPr>
-        </p:nvSpPr>
-        <p:spPr/>
-      </p:sp>
-      <p:sp>
-        <p:nvSpPr>
-          <p:cNvPr id="3" name="Notes Placeholder 2"/>
-          <p:cNvSpPr>
-            <a:spLocks noGrp="1"/>
-          </p:cNvSpPr>
-          <p:nvPr>
-            <p:ph type="body" idx="1"/>
-          </p:nvPr>
-        </p:nvSpPr>
-        <p:spPr/>
-        <p:txBody>
-          <a:bodyPr/>
-          <a:lstStyle/>
-          <a:p>
-            <a:r>
-              <a:rPr lang="en-US" dirty="0"/>
               <a:t>Kullanmaya başlamak: dört adım
 Her şeyi ilk gün taşımayız — önce tek bir projeyle güven kurarız.</a:t>
             </a:r>
@@ -1171,7 +1080,7 @@
           <a:p>
             <a:fld id="{F7021451-1387-4CA6-816F-3879F97B5CBC}" type="slidenum">
               <a:rPr lang="en-US"/>
-              <a:t>16</a:t>
+              <a:t>15</a:t>
             </a:fld>
             <a:endParaRPr lang="en-US"/>
           </a:p>
@@ -2243,7 +2152,7 @@
       </p:grpSpPr>
       <p:pic>
         <p:nvPicPr>
-          <p:cNvPr id="2" name="Image 0" descr="E:\Developer\GİT\hitprot-platform\.claude\worktrees\customer-presentation-visuals-95b761\docs\sunum\gorseller\slayt-01.png">    </p:cNvPr>
+          <p:cNvPr id="2" name="Image 0" descr="E:\Developer\GİT\hitprot-platform\.claude\worktrees\dernek-sunumu\docs\sunum\sirket\gorseller\slayt-01.png">    </p:cNvPr>
           <p:cNvPicPr>
             <a:picLocks noChangeAspect="1"/>
           </p:cNvPicPr>
@@ -2299,7 +2208,7 @@
       </p:grpSpPr>
       <p:pic>
         <p:nvPicPr>
-          <p:cNvPr id="2" name="Image 0" descr="E:\Developer\GİT\hitprot-platform\.claude\worktrees\customer-presentation-visuals-95b761\docs\sunum\gorseller\slayt-10.png">    </p:cNvPr>
+          <p:cNvPr id="2" name="Image 0" descr="E:\Developer\GİT\hitprot-platform\.claude\worktrees\dernek-sunumu\docs\sunum\sirket\gorseller\slayt-10.png">    </p:cNvPr>
           <p:cNvPicPr>
             <a:picLocks noChangeAspect="1"/>
           </p:cNvPicPr>
@@ -2355,7 +2264,7 @@
       </p:grpSpPr>
       <p:pic>
         <p:nvPicPr>
-          <p:cNvPr id="2" name="Image 0" descr="E:\Developer\GİT\hitprot-platform\.claude\worktrees\customer-presentation-visuals-95b761\docs\sunum\gorseller\slayt-11.png">    </p:cNvPr>
+          <p:cNvPr id="2" name="Image 0" descr="E:\Developer\GİT\hitprot-platform\.claude\worktrees\dernek-sunumu\docs\sunum\sirket\gorseller\slayt-11.png">    </p:cNvPr>
           <p:cNvPicPr>
             <a:picLocks noChangeAspect="1"/>
           </p:cNvPicPr>
@@ -2411,7 +2320,7 @@
       </p:grpSpPr>
       <p:pic>
         <p:nvPicPr>
-          <p:cNvPr id="2" name="Image 0" descr="E:\Developer\GİT\hitprot-platform\.claude\worktrees\customer-presentation-visuals-95b761\docs\sunum\gorseller\slayt-12.png">    </p:cNvPr>
+          <p:cNvPr id="2" name="Image 0" descr="E:\Developer\GİT\hitprot-platform\.claude\worktrees\dernek-sunumu\docs\sunum\sirket\gorseller\slayt-12.png">    </p:cNvPr>
           <p:cNvPicPr>
             <a:picLocks noChangeAspect="1"/>
           </p:cNvPicPr>
@@ -2467,7 +2376,7 @@
       </p:grpSpPr>
       <p:pic>
         <p:nvPicPr>
-          <p:cNvPr id="2" name="Image 0" descr="E:\Developer\GİT\hitprot-platform\.claude\worktrees\customer-presentation-visuals-95b761\docs\sunum\gorseller\slayt-13.png">    </p:cNvPr>
+          <p:cNvPr id="2" name="Image 0" descr="E:\Developer\GİT\hitprot-platform\.claude\worktrees\dernek-sunumu\docs\sunum\sirket\gorseller\slayt-13.png">    </p:cNvPr>
           <p:cNvPicPr>
             <a:picLocks noChangeAspect="1"/>
           </p:cNvPicPr>
@@ -2523,7 +2432,7 @@
       </p:grpSpPr>
       <p:pic>
         <p:nvPicPr>
-          <p:cNvPr id="2" name="Image 0" descr="E:\Developer\GİT\hitprot-platform\.claude\worktrees\customer-presentation-visuals-95b761\docs\sunum\gorseller\slayt-14.png">    </p:cNvPr>
+          <p:cNvPr id="2" name="Image 0" descr="E:\Developer\GİT\hitprot-platform\.claude\worktrees\dernek-sunumu\docs\sunum\sirket\gorseller\slayt-14.png">    </p:cNvPr>
           <p:cNvPicPr>
             <a:picLocks noChangeAspect="1"/>
           </p:cNvPicPr>
@@ -2559,7 +2468,7 @@
     <p:bg>
       <p:bgPr>
         <a:solidFill>
-          <a:srgbClr val="FFFFFF"/>
+          <a:srgbClr val="0B1220"/>
         </a:solidFill>
       </p:bgPr>
     </p:bg>
@@ -2579,7 +2488,7 @@
       </p:grpSpPr>
       <p:pic>
         <p:nvPicPr>
-          <p:cNvPr id="2" name="Image 0" descr="E:\Developer\GİT\hitprot-platform\.claude\worktrees\customer-presentation-visuals-95b761\docs\sunum\gorseller\slayt-15.png">    </p:cNvPr>
+          <p:cNvPr id="2" name="Image 0" descr="E:\Developer\GİT\hitprot-platform\.claude\worktrees\dernek-sunumu\docs\sunum\sirket\gorseller\slayt-15.png">    </p:cNvPr>
           <p:cNvPicPr>
             <a:picLocks noChangeAspect="1"/>
           </p:cNvPicPr>
@@ -2609,13 +2518,13 @@
 </p:sld>
 </file>
 
-<file path=ppt/slides/slide16.xml><?xml version="1.0" encoding="utf-8"?>
+<file path=ppt/slides/slide2.xml><?xml version="1.0" encoding="utf-8"?>
 <p:sld xmlns:a="http://schemas.openxmlformats.org/drawingml/2006/main" xmlns:r="http://schemas.openxmlformats.org/officeDocument/2006/relationships" xmlns:p="http://schemas.openxmlformats.org/presentationml/2006/main">
-  <p:cSld name="Slide 16">
+  <p:cSld name="Slide 2">
     <p:bg>
       <p:bgPr>
         <a:solidFill>
-          <a:srgbClr val="0B1220"/>
+          <a:srgbClr val="FFFFFF"/>
         </a:solidFill>
       </p:bgPr>
     </p:bg>
@@ -2635,7 +2544,7 @@
       </p:grpSpPr>
       <p:pic>
         <p:nvPicPr>
-          <p:cNvPr id="2" name="Image 0" descr="E:\Developer\GİT\hitprot-platform\.claude\worktrees\customer-presentation-visuals-95b761\docs\sunum\gorseller\slayt-16.png">    </p:cNvPr>
+          <p:cNvPr id="2" name="Image 0" descr="E:\Developer\GİT\hitprot-platform\.claude\worktrees\dernek-sunumu\docs\sunum\sirket\gorseller\slayt-02.png">    </p:cNvPr>
           <p:cNvPicPr>
             <a:picLocks noChangeAspect="1"/>
           </p:cNvPicPr>
@@ -2665,9 +2574,9 @@
 </p:sld>
 </file>
 
-<file path=ppt/slides/slide2.xml><?xml version="1.0" encoding="utf-8"?>
+<file path=ppt/slides/slide3.xml><?xml version="1.0" encoding="utf-8"?>
 <p:sld xmlns:a="http://schemas.openxmlformats.org/drawingml/2006/main" xmlns:r="http://schemas.openxmlformats.org/officeDocument/2006/relationships" xmlns:p="http://schemas.openxmlformats.org/presentationml/2006/main">
-  <p:cSld name="Slide 2">
+  <p:cSld name="Slide 3">
     <p:bg>
       <p:bgPr>
         <a:solidFill>
@@ -2691,7 +2600,7 @@
       </p:grpSpPr>
       <p:pic>
         <p:nvPicPr>
-          <p:cNvPr id="2" name="Image 0" descr="E:\Developer\GİT\hitprot-platform\.claude\worktrees\customer-presentation-visuals-95b761\docs\sunum\gorseller\slayt-02.png">    </p:cNvPr>
+          <p:cNvPr id="2" name="Image 0" descr="E:\Developer\GİT\hitprot-platform\.claude\worktrees\dernek-sunumu\docs\sunum\sirket\gorseller\slayt-03.png">    </p:cNvPr>
           <p:cNvPicPr>
             <a:picLocks noChangeAspect="1"/>
           </p:cNvPicPr>
@@ -2721,9 +2630,9 @@
 </p:sld>
 </file>
 
-<file path=ppt/slides/slide3.xml><?xml version="1.0" encoding="utf-8"?>
+<file path=ppt/slides/slide4.xml><?xml version="1.0" encoding="utf-8"?>
 <p:sld xmlns:a="http://schemas.openxmlformats.org/drawingml/2006/main" xmlns:r="http://schemas.openxmlformats.org/officeDocument/2006/relationships" xmlns:p="http://schemas.openxmlformats.org/presentationml/2006/main">
-  <p:cSld name="Slide 3">
+  <p:cSld name="Slide 4">
     <p:bg>
       <p:bgPr>
         <a:solidFill>
@@ -2747,7 +2656,7 @@
       </p:grpSpPr>
       <p:pic>
         <p:nvPicPr>
-          <p:cNvPr id="2" name="Image 0" descr="E:\Developer\GİT\hitprot-platform\.claude\worktrees\customer-presentation-visuals-95b761\docs\sunum\gorseller\slayt-03.png">    </p:cNvPr>
+          <p:cNvPr id="2" name="Image 0" descr="E:\Developer\GİT\hitprot-platform\.claude\worktrees\dernek-sunumu\docs\sunum\sirket\gorseller\slayt-04.png">    </p:cNvPr>
           <p:cNvPicPr>
             <a:picLocks noChangeAspect="1"/>
           </p:cNvPicPr>
@@ -2777,9 +2686,9 @@
 </p:sld>
 </file>
 
-<file path=ppt/slides/slide4.xml><?xml version="1.0" encoding="utf-8"?>
+<file path=ppt/slides/slide5.xml><?xml version="1.0" encoding="utf-8"?>
 <p:sld xmlns:a="http://schemas.openxmlformats.org/drawingml/2006/main" xmlns:r="http://schemas.openxmlformats.org/officeDocument/2006/relationships" xmlns:p="http://schemas.openxmlformats.org/presentationml/2006/main">
-  <p:cSld name="Slide 4">
+  <p:cSld name="Slide 5">
     <p:bg>
       <p:bgPr>
         <a:solidFill>
@@ -2803,7 +2712,7 @@
       </p:grpSpPr>
       <p:pic>
         <p:nvPicPr>
-          <p:cNvPr id="2" name="Image 0" descr="E:\Developer\GİT\hitprot-platform\.claude\worktrees\customer-presentation-visuals-95b761\docs\sunum\gorseller\slayt-04.png">    </p:cNvPr>
+          <p:cNvPr id="2" name="Image 0" descr="E:\Developer\GİT\hitprot-platform\.claude\worktrees\dernek-sunumu\docs\sunum\sirket\gorseller\slayt-05.png">    </p:cNvPr>
           <p:cNvPicPr>
             <a:picLocks noChangeAspect="1"/>
           </p:cNvPicPr>
@@ -2833,9 +2742,9 @@
 </p:sld>
 </file>
 
-<file path=ppt/slides/slide5.xml><?xml version="1.0" encoding="utf-8"?>
+<file path=ppt/slides/slide6.xml><?xml version="1.0" encoding="utf-8"?>
 <p:sld xmlns:a="http://schemas.openxmlformats.org/drawingml/2006/main" xmlns:r="http://schemas.openxmlformats.org/officeDocument/2006/relationships" xmlns:p="http://schemas.openxmlformats.org/presentationml/2006/main">
-  <p:cSld name="Slide 5">
+  <p:cSld name="Slide 6">
     <p:bg>
       <p:bgPr>
         <a:solidFill>
@@ -2859,7 +2768,7 @@
       </p:grpSpPr>
       <p:pic>
         <p:nvPicPr>
-          <p:cNvPr id="2" name="Image 0" descr="E:\Developer\GİT\hitprot-platform\.claude\worktrees\customer-presentation-visuals-95b761\docs\sunum\gorseller\slayt-05.png">    </p:cNvPr>
+          <p:cNvPr id="2" name="Image 0" descr="E:\Developer\GİT\hitprot-platform\.claude\worktrees\dernek-sunumu\docs\sunum\sirket\gorseller\slayt-06.png">    </p:cNvPr>
           <p:cNvPicPr>
             <a:picLocks noChangeAspect="1"/>
           </p:cNvPicPr>
@@ -2889,9 +2798,9 @@
 </p:sld>
 </file>
 
-<file path=ppt/slides/slide6.xml><?xml version="1.0" encoding="utf-8"?>
+<file path=ppt/slides/slide7.xml><?xml version="1.0" encoding="utf-8"?>
 <p:sld xmlns:a="http://schemas.openxmlformats.org/drawingml/2006/main" xmlns:r="http://schemas.openxmlformats.org/officeDocument/2006/relationships" xmlns:p="http://schemas.openxmlformats.org/presentationml/2006/main">
-  <p:cSld name="Slide 6">
+  <p:cSld name="Slide 7">
     <p:bg>
       <p:bgPr>
         <a:solidFill>
@@ -2915,7 +2824,7 @@
       </p:grpSpPr>
       <p:pic>
         <p:nvPicPr>
-          <p:cNvPr id="2" name="Image 0" descr="E:\Developer\GİT\hitprot-platform\.claude\worktrees\customer-presentation-visuals-95b761\docs\sunum\gorseller\slayt-06.png">    </p:cNvPr>
+          <p:cNvPr id="2" name="Image 0" descr="E:\Developer\GİT\hitprot-platform\.claude\worktrees\dernek-sunumu\docs\sunum\sirket\gorseller\slayt-07.png">    </p:cNvPr>
           <p:cNvPicPr>
             <a:picLocks noChangeAspect="1"/>
           </p:cNvPicPr>
@@ -2945,9 +2854,9 @@
 </p:sld>
 </file>
 
-<file path=ppt/slides/slide7.xml><?xml version="1.0" encoding="utf-8"?>
+<file path=ppt/slides/slide8.xml><?xml version="1.0" encoding="utf-8"?>
 <p:sld xmlns:a="http://schemas.openxmlformats.org/drawingml/2006/main" xmlns:r="http://schemas.openxmlformats.org/officeDocument/2006/relationships" xmlns:p="http://schemas.openxmlformats.org/presentationml/2006/main">
-  <p:cSld name="Slide 7">
+  <p:cSld name="Slide 8">
     <p:bg>
       <p:bgPr>
         <a:solidFill>
@@ -2971,7 +2880,7 @@
       </p:grpSpPr>
       <p:pic>
         <p:nvPicPr>
-          <p:cNvPr id="2" name="Image 0" descr="E:\Developer\GİT\hitprot-platform\.claude\worktrees\customer-presentation-visuals-95b761\docs\sunum\gorseller\slayt-07.png">    </p:cNvPr>
+          <p:cNvPr id="2" name="Image 0" descr="E:\Developer\GİT\hitprot-platform\.claude\worktrees\dernek-sunumu\docs\sunum\sirket\gorseller\slayt-08.png">    </p:cNvPr>
           <p:cNvPicPr>
             <a:picLocks noChangeAspect="1"/>
           </p:cNvPicPr>
@@ -3001,9 +2910,9 @@
 </p:sld>
 </file>
 
-<file path=ppt/slides/slide8.xml><?xml version="1.0" encoding="utf-8"?>
+<file path=ppt/slides/slide9.xml><?xml version="1.0" encoding="utf-8"?>
 <p:sld xmlns:a="http://schemas.openxmlformats.org/drawingml/2006/main" xmlns:r="http://schemas.openxmlformats.org/officeDocument/2006/relationships" xmlns:p="http://schemas.openxmlformats.org/presentationml/2006/main">
-  <p:cSld name="Slide 8">
+  <p:cSld name="Slide 9">
     <p:bg>
       <p:bgPr>
         <a:solidFill>
@@ -3027,63 +2936,7 @@
       </p:grpSpPr>
       <p:pic>
         <p:nvPicPr>
-          <p:cNvPr id="2" name="Image 0" descr="E:\Developer\GİT\hitprot-platform\.claude\worktrees\customer-presentation-visuals-95b761\docs\sunum\gorseller\slayt-08.png">    </p:cNvPr>
-          <p:cNvPicPr>
-            <a:picLocks noChangeAspect="1"/>
-          </p:cNvPicPr>
-          <p:nvPr/>
-        </p:nvPicPr>
-        <p:blipFill>
-          <a:blip r:embed="rId1"/>
-          <a:stretch>
-            <a:fillRect/>
-          </a:stretch>
-        </p:blipFill>
-        <p:spPr>
-          <a:xfrm>
-            <a:off x="0" y="0"/>
-            <a:ext cx="12191695" cy="6858000"/>
-          </a:xfrm>
-          <a:prstGeom prst="rect">
-            <a:avLst/>
-          </a:prstGeom>
-        </p:spPr>
-      </p:pic>
-    </p:spTree>
-  </p:cSld>
-  <p:clrMapOvr>
-    <a:masterClrMapping/>
-  </p:clrMapOvr>
-</p:sld>
-</file>
-
-<file path=ppt/slides/slide9.xml><?xml version="1.0" encoding="utf-8"?>
-<p:sld xmlns:a="http://schemas.openxmlformats.org/drawingml/2006/main" xmlns:r="http://schemas.openxmlformats.org/officeDocument/2006/relationships" xmlns:p="http://schemas.openxmlformats.org/presentationml/2006/main">
-  <p:cSld name="Slide 9">
-    <p:bg>
-      <p:bgPr>
-        <a:solidFill>
-          <a:srgbClr val="FFFFFF"/>
-        </a:solidFill>
-      </p:bgPr>
-    </p:bg>
-    <p:spTree>
-      <p:nvGrpSpPr>
-        <p:cNvPr id="1" name=""/>
-        <p:cNvGrpSpPr/>
-        <p:nvPr/>
-      </p:nvGrpSpPr>
-      <p:grpSpPr>
-        <a:xfrm>
-          <a:off x="0" y="0"/>
-          <a:ext cx="0" cy="0"/>
-          <a:chOff x="0" y="0"/>
-          <a:chExt cx="0" cy="0"/>
-        </a:xfrm>
-      </p:grpSpPr>
-      <p:pic>
-        <p:nvPicPr>
-          <p:cNvPr id="2" name="Image 0" descr="E:\Developer\GİT\hitprot-platform\.claude\worktrees\customer-presentation-visuals-95b761\docs\sunum\gorseller\slayt-09.png">    </p:cNvPr>
+          <p:cNvPr id="2" name="Image 0" descr="E:\Developer\GİT\hitprot-platform\.claude\worktrees\dernek-sunumu\docs\sunum\sirket\gorseller\slayt-09.png">    </p:cNvPr>
           <p:cNvPicPr>
             <a:picLocks noChangeAspect="1"/>
           </p:cNvPicPr>
